--- a/decks/maths-perimeter-area/maths-perimeter-area_ch1_metric-units.pptx
+++ b/decks/maths-perimeter-area/maths-perimeter-area_ch1_metric-units.pptx
@@ -122,29 +122,29 @@
   <p:extLst>
     <p:ext uri="{521415D9-36F7-43E2-AB2F-B90AF26B5E84}">
       <p14:sectionLst xmlns:p14="http://schemas.microsoft.com/office/powerpoint/2010/main">
-        <p14:section name="Opening" id="{246cdbdb-e4ec-ffbd-efc4-691cfa03c386}">
+        <p14:section name="Opening" id="{dece4710-15ad-e3db-1bba-7e9e3f9a2c71}">
           <p14:sldIdLst>
             <p14:sldId id="256"/>
           </p14:sldIdLst>
         </p14:section>
-        <p14:section name="Gate" id="{de4b95ad-a7b2-2fb4-bd01-b2125b3d9586}">
+        <p14:section name="Gate" id="{83b14d2f-b1b0-e4cc-0e91-18732086d1dc}">
           <p14:sldIdLst>
             <p14:sldId id="257"/>
             <p14:sldId id="258"/>
           </p14:sldIdLst>
         </p14:section>
-        <p14:section name="Pre-teach" id="{b43362f0-2684-1d58-ef50-28dd225ef069}">
+        <p14:section name="Pre-teach" id="{f1c5cb47-d71a-af12-3015-c0637fd59a3f}">
           <p14:sldIdLst>
             <p14:sldId id="259"/>
           </p14:sldIdLst>
         </p14:section>
-        <p14:section name="Read-along" id="{04e4f076-7b1f-2450-3bc6-4249ad15f4fb}">
+        <p14:section name="Read-along" id="{aeae3441-2219-e5b1-ea2e-3bc37f0b9cd5}">
           <p14:sldIdLst>
             <p14:sldId id="260"/>
             <p14:sldId id="261"/>
           </p14:sldIdLst>
         </p14:section>
-        <p14:section name="Teach" id="{428bea90-051a-c1b9-021b-e4a66cf4b797}">
+        <p14:section name="Teach" id="{2ae1c446-54d2-d705-0976-3f4789030ca6}">
           <p14:sldIdLst>
             <p14:sldId id="262"/>
             <p14:sldId id="263"/>
@@ -152,18 +152,18 @@
             <p14:sldId id="265"/>
           </p14:sldIdLst>
         </p14:section>
-        <p14:section name="Routes" id="{fee74778-f42c-b7f3-27bf-6bbebecedc88}">
+        <p14:section name="Routes" id="{5257a759-820f-dd1d-88d4-ede22573e47f}">
           <p14:sldIdLst>
             <p14:sldId id="266"/>
             <p14:sldId id="267"/>
           </p14:sldIdLst>
         </p14:section>
-        <p14:section name="Close" id="{9bffd139-e6fb-5ba2-ee9c-fe70d54c1668}">
+        <p14:section name="Close" id="{d3917cd8-5506-c3a8-4b0c-1866bbae8e55}">
           <p14:sldIdLst>
             <p14:sldId id="268"/>
           </p14:sldIdLst>
         </p14:section>
-        <p14:section name="Answers" id="{96b1f5ad-cdbb-5733-3979-23aeeac165e0}">
+        <p14:section name="Answers" id="{0a64ce27-5e2a-8de4-2ac3-d761b7974f4b}">
           <p14:sldIdLst>
             <p14:sldId id="269"/>
             <p14:sldId id="270"/>
@@ -1130,7 +1130,7 @@
             <a:r>
               <a:rPr lang="en-US" dirty="0"/>
               <a:t>Answers — task 2: Metres to centimetres. Reveal the answer; pupils mark their own work in a different colour, then read the "why" together. Same destination for every lane, so one answer serves the whole class.
-Answer: B   360 cm
+Answer: D   360 cm
 Why: There are 100 cm in every metre, so 3.6 × 100 = 360.
 Ask a Support pupil to explain one step, and a Stretch pupil to share their extension.</a:t>
             </a:r>
@@ -1312,7 +1312,7 @@
             <a:r>
               <a:rPr lang="en-US" dirty="0"/>
               <a:t>Do now — retrieval. Silent, no notes, no help: recall comes before any support. Give about four minutes.
-1. Which unit is most sensible for measuring the length of a classroom?  →  C   metres
+1. Which unit is most sensible for measuring the length of a classroom?  →  A   metres
 2. Convert 7 cm to millimetres.  →  70 mm
 3. There are ___ metres in 1 kilometre.  →  1000
 Circulate: who gets 3/3 (Stretch route), 2/3 (Core), 0–1 (Support)? Use this to route pupils later in the lesson.</a:t>
@@ -1404,7 +1404,7 @@
             <a:r>
               <a:rPr lang="en-US" dirty="0"/>
               <a:t>Answers — pupils mark their own in a different colour, then hands up for 3/3, 2/3, 1/3.
-1. C   metres. A classroom is a few big steps long, so metres give a sensible number, about 8 m.
+1. A   metres. A classroom is a few big steps long, so metres give a sensible number, about 8 m.
 2. 70 mm. There are 10 mm in every centimetre, so 7 × 10 = 70.
 3. 1000. Kilo- means a thousand: 1 km is 1000 m.
 Say the route each score points to: 3/3 Stretch, 2/3 Core, 0–1 Support. Pupils may choose to move up.</a:t>
@@ -6024,6 +6024,34 @@
                 <a:ea typeface="Calibri" pitchFamily="34" charset="-122"/>
                 <a:cs typeface="Calibri" pitchFamily="34" charset="-120"/>
               </a:rPr>
+              <a:t>3600 cm      </a:t>
+            </a:r>
+            <a:pPr algn="ctr" indent="0" marL="0">
+              <a:buNone/>
+            </a:pPr>
+            <a:r>
+              <a:rPr lang="en-US" sz="1800" b="1" dirty="0">
+                <a:solidFill>
+                  <a:srgbClr val="B8862B"/>
+                </a:solidFill>
+                <a:latin typeface="Calibri" pitchFamily="34" charset="0"/>
+                <a:ea typeface="Calibri" pitchFamily="34" charset="-122"/>
+                <a:cs typeface="Calibri" pitchFamily="34" charset="-120"/>
+              </a:rPr>
+              <a:t>B  </a:t>
+            </a:r>
+            <a:pPr algn="ctr" indent="0" marL="0">
+              <a:buNone/>
+            </a:pPr>
+            <a:r>
+              <a:rPr lang="en-US" sz="1800" dirty="0">
+                <a:solidFill>
+                  <a:srgbClr val="1E2229"/>
+                </a:solidFill>
+                <a:latin typeface="Calibri" pitchFamily="34" charset="0"/>
+                <a:ea typeface="Calibri" pitchFamily="34" charset="-122"/>
+                <a:cs typeface="Calibri" pitchFamily="34" charset="-120"/>
+              </a:rPr>
               <a:t>36 cm      </a:t>
             </a:r>
             <a:pPr algn="ctr" indent="0" marL="0">
@@ -6038,7 +6066,7 @@
                 <a:ea typeface="Calibri" pitchFamily="34" charset="-122"/>
                 <a:cs typeface="Calibri" pitchFamily="34" charset="-120"/>
               </a:rPr>
-              <a:t>B  </a:t>
+              <a:t>C  </a:t>
             </a:r>
             <a:pPr algn="ctr" indent="0" marL="0">
               <a:buNone/>
@@ -6052,7 +6080,7 @@
                 <a:ea typeface="Calibri" pitchFamily="34" charset="-122"/>
                 <a:cs typeface="Calibri" pitchFamily="34" charset="-120"/>
               </a:rPr>
-              <a:t>360 cm      </a:t>
+              <a:t>0.036 cm      </a:t>
             </a:r>
             <a:pPr algn="ctr" indent="0" marL="0">
               <a:buNone/>
@@ -6066,7 +6094,7 @@
                 <a:ea typeface="Calibri" pitchFamily="34" charset="-122"/>
                 <a:cs typeface="Calibri" pitchFamily="34" charset="-120"/>
               </a:rPr>
-              <a:t>C  </a:t>
+              <a:t>D  </a:t>
             </a:r>
             <a:pPr algn="ctr" indent="0" marL="0">
               <a:buNone/>
@@ -6080,35 +6108,7 @@
                 <a:ea typeface="Calibri" pitchFamily="34" charset="-122"/>
                 <a:cs typeface="Calibri" pitchFamily="34" charset="-120"/>
               </a:rPr>
-              <a:t>3600 cm      </a:t>
-            </a:r>
-            <a:pPr algn="ctr" indent="0" marL="0">
-              <a:buNone/>
-            </a:pPr>
-            <a:r>
-              <a:rPr lang="en-US" sz="1800" b="1" dirty="0">
-                <a:solidFill>
-                  <a:srgbClr val="B8862B"/>
-                </a:solidFill>
-                <a:latin typeface="Calibri" pitchFamily="34" charset="0"/>
-                <a:ea typeface="Calibri" pitchFamily="34" charset="-122"/>
-                <a:cs typeface="Calibri" pitchFamily="34" charset="-120"/>
-              </a:rPr>
-              <a:t>D  </a:t>
-            </a:r>
-            <a:pPr algn="ctr" indent="0" marL="0">
-              <a:buNone/>
-            </a:pPr>
-            <a:r>
-              <a:rPr lang="en-US" sz="1800" dirty="0">
-                <a:solidFill>
-                  <a:srgbClr val="1E2229"/>
-                </a:solidFill>
-                <a:latin typeface="Calibri" pitchFamily="34" charset="0"/>
-                <a:ea typeface="Calibri" pitchFamily="34" charset="-122"/>
-                <a:cs typeface="Calibri" pitchFamily="34" charset="-120"/>
-              </a:rPr>
-              <a:t>0.036 cm</a:t>
+              <a:t>360 cm</a:t>
             </a:r>
             <a:endParaRPr lang="en-US" sz="2000" dirty="0"/>
           </a:p>
@@ -8073,7 +8073,7 @@
                 <a:ea typeface="Cambria" pitchFamily="34" charset="-122"/>
                 <a:cs typeface="Cambria" pitchFamily="34" charset="-120"/>
               </a:rPr>
-              <a:t>B   360 cm</a:t>
+              <a:t>D   360 cm</a:t>
             </a:r>
             <a:endParaRPr lang="en-US" sz="1800" dirty="0"/>
           </a:p>
@@ -9177,7 +9177,7 @@
                 <a:ea typeface="Calibri" pitchFamily="34" charset="-122"/>
                 <a:cs typeface="Calibri" pitchFamily="34" charset="-120"/>
               </a:rPr>
-              <a:t>millimetres</a:t>
+              <a:t>metres</a:t>
             </a:r>
             <a:endParaRPr lang="en-US" sz="2400" dirty="0"/>
           </a:p>
@@ -9214,7 +9214,7 @@
                 <a:ea typeface="Calibri" pitchFamily="34" charset="-122"/>
                 <a:cs typeface="Calibri" pitchFamily="34" charset="-120"/>
               </a:rPr>
-              <a:t>centimetres</a:t>
+              <a:t>kilometres</a:t>
             </a:r>
             <a:endParaRPr lang="en-US" sz="2400" dirty="0"/>
           </a:p>
@@ -9251,7 +9251,7 @@
                 <a:ea typeface="Calibri" pitchFamily="34" charset="-122"/>
                 <a:cs typeface="Calibri" pitchFamily="34" charset="-120"/>
               </a:rPr>
-              <a:t>metres</a:t>
+              <a:t>millimetres</a:t>
             </a:r>
             <a:endParaRPr lang="en-US" sz="2400" dirty="0"/>
           </a:p>
@@ -9288,7 +9288,7 @@
                 <a:ea typeface="Calibri" pitchFamily="34" charset="-122"/>
                 <a:cs typeface="Calibri" pitchFamily="34" charset="-120"/>
               </a:rPr>
-              <a:t>kilometres</a:t>
+              <a:t>centimetres</a:t>
             </a:r>
             <a:endParaRPr lang="en-US" sz="2400" dirty="0"/>
           </a:p>
@@ -10085,7 +10085,7 @@
                 <a:ea typeface="Calibri" pitchFamily="34" charset="-122"/>
                 <a:cs typeface="Calibri" pitchFamily="34" charset="-120"/>
               </a:rPr>
-              <a:t>C   metres</a:t>
+              <a:t>A   metres</a:t>
             </a:r>
             <a:endParaRPr lang="en-US" sz="2200" dirty="0"/>
           </a:p>

--- a/decks/maths-perimeter-area/maths-perimeter-area_ch1_metric-units.pptx
+++ b/decks/maths-perimeter-area/maths-perimeter-area_ch1_metric-units.pptx
@@ -122,29 +122,29 @@
   <p:extLst>
     <p:ext uri="{521415D9-36F7-43E2-AB2F-B90AF26B5E84}">
       <p14:sectionLst xmlns:p14="http://schemas.microsoft.com/office/powerpoint/2010/main">
-        <p14:section name="Opening" id="{dece4710-15ad-e3db-1bba-7e9e3f9a2c71}">
+        <p14:section name="Opening" id="{790f2a2c-1acf-9dfe-7dee-cd8b776af625}">
           <p14:sldIdLst>
             <p14:sldId id="256"/>
           </p14:sldIdLst>
         </p14:section>
-        <p14:section name="Gate" id="{83b14d2f-b1b0-e4cc-0e91-18732086d1dc}">
+        <p14:section name="Gate" id="{9f247e77-78ae-0019-b0ee-3ba276cf3a06}">
           <p14:sldIdLst>
             <p14:sldId id="257"/>
             <p14:sldId id="258"/>
           </p14:sldIdLst>
         </p14:section>
-        <p14:section name="Pre-teach" id="{f1c5cb47-d71a-af12-3015-c0637fd59a3f}">
+        <p14:section name="Pre-teach" id="{96cb3498-5fda-1f74-ca28-8ff68338886c}">
           <p14:sldIdLst>
             <p14:sldId id="259"/>
           </p14:sldIdLst>
         </p14:section>
-        <p14:section name="Read-along" id="{aeae3441-2219-e5b1-ea2e-3bc37f0b9cd5}">
+        <p14:section name="Read-along" id="{42b88aad-5099-f830-453e-530581188639}">
           <p14:sldIdLst>
             <p14:sldId id="260"/>
             <p14:sldId id="261"/>
           </p14:sldIdLst>
         </p14:section>
-        <p14:section name="Teach" id="{2ae1c446-54d2-d705-0976-3f4789030ca6}">
+        <p14:section name="Teach" id="{4af5ae9c-b3b2-421c-ec66-9dae431a3046}">
           <p14:sldIdLst>
             <p14:sldId id="262"/>
             <p14:sldId id="263"/>
@@ -152,18 +152,18 @@
             <p14:sldId id="265"/>
           </p14:sldIdLst>
         </p14:section>
-        <p14:section name="Routes" id="{5257a759-820f-dd1d-88d4-ede22573e47f}">
+        <p14:section name="Routes" id="{43fc1638-ab54-778e-636b-918b61185617}">
           <p14:sldIdLst>
             <p14:sldId id="266"/>
             <p14:sldId id="267"/>
           </p14:sldIdLst>
         </p14:section>
-        <p14:section name="Close" id="{d3917cd8-5506-c3a8-4b0c-1866bbae8e55}">
+        <p14:section name="Close" id="{ebb03619-7726-7702-57cc-8dbef2c234fd}">
           <p14:sldIdLst>
             <p14:sldId id="268"/>
           </p14:sldIdLst>
         </p14:section>
-        <p14:section name="Answers" id="{0a64ce27-5e2a-8de4-2ac3-d761b7974f4b}">
+        <p14:section name="Answers" id="{ae77b9ac-45c3-05e0-d1f6-648bed4c5682}">
           <p14:sldIdLst>
             <p14:sldId id="269"/>
             <p14:sldId id="270"/>
